--- a/week-06/presentations/ppts/day-05-negotiating-priorities-roadmaps.pptx
+++ b/week-06/presentations/ppts/day-05-negotiating-priorities-roadmaps.pptx
@@ -538,7 +538,7 @@
             </a:pPr>
             <a:r>
               <a:rPr/>
-              <a:t>Friday. 3 simulated negotiation rounds. SEP §5 outcomes log. Sign-off.</a:t>
+              <a:t>Friday. 3 simulated negotiation rounds. SEP Section 5 outcomes log. Sign-off.</a:t>
             </a:r>
           </a:p>
         </p:txBody>
@@ -4893,7 +4893,7 @@
             </a:pPr>
             <a:r>
               <a:rPr/>
-              <a:t>Author defends PRD §3 non-goals + §11 follow-ups. Hold / cut / phase / escalate. ⏱ 5 prep + 15 negotiate + 10 debrief × 2</a:t>
+              <a:t>Author defends PRD Section 3 non-goals + Section 11 follow-ups. Hold / cut / phase / escalate. ⏱ 5 prep + 15 negotiate + 10 debrief × 2</a:t>
             </a:r>
           </a:p>
         </p:txBody>
@@ -5060,7 +5060,7 @@
             </a:pPr>
             <a:r>
               <a:rPr/>
-              <a:t>📝 SEP §5 Outcomes Log Entry</a:t>
+              <a:t>📝 SEP Section 5 Outcomes Log Entry</a:t>
             </a:r>
           </a:p>
         </p:txBody>
@@ -5489,7 +5489,7 @@
             </a:pPr>
             <a:r>
               <a:rPr/>
-              <a:t>Capture each round in the SEP §5 outcomes log with owner + next step</a:t>
+              <a:t>Capture each round in the SEP Section 5 outcomes log with owner + next step</a:t>
             </a:r>
           </a:p>
           <a:p>

--- a/week-06/presentations/ppts/day-05-negotiating-priorities-roadmaps.pptx
+++ b/week-06/presentations/ppts/day-05-negotiating-priorities-roadmaps.pptx
@@ -4893,7 +4893,7 @@
             </a:pPr>
             <a:r>
               <a:rPr/>
-              <a:t>Author defends PRD Section 3 non-goals + Section 11 follow-ups. Hold / cut / phase / escalate. ⏱ 5 prep + 15 negotiate + 10 debrief × 2</a:t>
+              <a:t>Author defends Product Requirements Document (PRD) Section 3 non-goals + Section 11 follow-ups. Hold / cut / phase / escalate. ⏱ 5 prep + 15 negotiate + 10 debrief × 2</a:t>
             </a:r>
           </a:p>
         </p:txBody>
@@ -5141,7 +5141,7 @@
             </a:pPr>
             <a:r>
               <a:rPr/>
-              <a:t>Stakeholder map (P×I + RACI + watch list)</a:t>
+              <a:t>Stakeholder map (P×I + RACI matrix [Responsible, Accountable, Consulted, Informed] + watch list)</a:t>
             </a:r>
           </a:p>
           <a:p>
@@ -5204,7 +5204,7 @@
             </a:pPr>
             <a:r>
               <a:rPr/>
-              <a:t>Agile Delivery &amp; ADO Mastery</a:t>
+              <a:t>Agile Delivery &amp; Azure DevOps (ADO) Mastery</a:t>
             </a:r>
           </a:p>
           <a:p>
@@ -5240,7 +5240,7 @@
             </a:pPr>
             <a:r>
               <a:rPr/>
-              <a:t>Bring to Monday: PRD + TCD + TMD + SEP. The full set of artifacts is now your delivery input.</a:t>
+              <a:t>Bring to Monday: PRD + Technical Concept Document (TCD) + Technical Modeling Document (TMD) + SEP. The full set of artifacts is now your delivery input.</a:t>
             </a:r>
           </a:p>
         </p:txBody>
@@ -5462,7 +5462,7 @@
             </a:pPr>
             <a:r>
               <a:rPr/>
-              <a:t>Run 3 simulated negotiation rounds: Architecture/SLO, Scope, Resource/Timeline</a:t>
+              <a:t>Run 3 simulated negotiation rounds: Architecture/SLO (Service Level Objective), Scope, Resource/Timeline</a:t>
             </a:r>
           </a:p>
           <a:p>
@@ -5489,7 +5489,7 @@
             </a:pPr>
             <a:r>
               <a:rPr/>
-              <a:t>Capture each round in the SEP Section 5 outcomes log with owner + next step</a:t>
+              <a:t>Capture each round in the Stakeholder Engagement Plan (SEP) Section 5 outcomes log with owner + next step</a:t>
             </a:r>
           </a:p>
           <a:p>

--- a/week-06/presentations/ppts/day-05-negotiating-priorities-roadmaps.pptx
+++ b/week-06/presentations/ppts/day-05-negotiating-priorities-roadmaps.pptx
@@ -5061,6 +5061,45 @@
             <a:r>
               <a:rPr/>
               <a:t>📝 SEP Section 5 Outcomes Log Entry</a:t>
+            </a:r>
+          </a:p>
+        </p:txBody>
+      </p:sp>
+      <p:sp>
+        <p:nvSpPr>
+          <p:cNvPr id="3" name="Content Placeholder 2"/>
+          <p:cNvSpPr>
+            <a:spLocks noGrp="1"/>
+          </p:cNvSpPr>
+          <p:nvPr>
+            <p:ph idx="1"/>
+          </p:nvPr>
+        </p:nvSpPr>
+        <p:spPr/>
+        <p:txBody>
+          <a:bodyPr/>
+          <a:lstStyle/>
+          <a:p>
+            <a:pPr lvl="0" indent="0">
+              <a:buNone/>
+            </a:pPr>
+            <a:r>
+              <a:rPr>
+                <a:latin typeface="Courier"/>
+              </a:rPr>
+              <a:t>### Round N: &lt;topic&gt;
+**Triad A (author):** ...  |  **Triad B (stakeholder):** ...
+**Stakeholder role:** ...
+**The ask:** ...
+**Stakeholder's response:** top 1–2 objections
+**Trade space surfaced:** what offered to move; what held
+**Agreement:** what was agreed; or "deferred to &lt;date&gt;"; or
+"disagreed; escalation to &lt;person&gt;"
+**Owner + next step:** specific
+**What we learned:** one sentence
+**Score:**
+- Author: total /4.0
+- Stakeholder: total /4.0</a:t>
             </a:r>
           </a:p>
         </p:txBody>

--- a/week-06/presentations/ppts/day-05-negotiating-priorities-roadmaps.pptx
+++ b/week-06/presentations/ppts/day-05-negotiating-priorities-roadmaps.pptx
@@ -866,7 +866,7 @@
             </a:pPr>
             <a:r>
               <a:rPr/>
-              <a:t>Public read-aloud: facilitator names the best line from each triad’s negotiation.</a:t>
+              <a:t>Public read-aloud: facilitator names the best line from each quad’s negotiation.</a:t>
             </a:r>
           </a:p>
         </p:txBody>
@@ -1276,7 +1276,7 @@
             </a:pPr>
             <a:r>
               <a:rPr/>
-              <a:t>Triads play stakeholder for one round and author for another.</a:t>
+              <a:t>Quads play stakeholder for one round and author for another.</a:t>
             </a:r>
           </a:p>
         </p:txBody>
@@ -4848,16 +4848,16 @@
             </a:pPr>
             <a:r>
               <a:rPr b="1"/>
-              <a:t>Triad pairs • 90 minutes</a:t>
-            </a:r>
-          </a:p>
-          <a:p>
-            <a:pPr lvl="0" indent="0" marL="0">
-              <a:buNone/>
-            </a:pPr>
-            <a:r>
-              <a:rPr/>
-              <a:t>Stakeholder triad arrives with a scope-creep ask:</a:t>
+              <a:t>Quad pairs • 90 minutes</a:t>
+            </a:r>
+          </a:p>
+          <a:p>
+            <a:pPr lvl="0" indent="0" marL="0">
+              <a:buNone/>
+            </a:pPr>
+            <a:r>
+              <a:rPr/>
+              <a:t>Stakeholder quad arrives with a scope-creep ask:</a:t>
             </a:r>
           </a:p>
           <a:p>
@@ -5088,7 +5088,7 @@
                 <a:latin typeface="Courier"/>
               </a:rPr>
               <a:t>### Round N: &lt;topic&gt;
-**Triad A (author):** ...  |  **Triad B (stakeholder):** ...
+**Quad A (author):** ...  |  **Quad B (stakeholder):** ...
 **Stakeholder role:** ...
 **The ask:** ...
 **Stakeholder's response:** top 1–2 objections
@@ -6443,16 +6443,16 @@
             </a:pPr>
             <a:r>
               <a:rPr b="1"/>
-              <a:t>Triad pairs • 90 minutes total</a:t>
-            </a:r>
-          </a:p>
-          <a:p>
-            <a:pPr lvl="0" indent="0" marL="0">
-              <a:buNone/>
-            </a:pPr>
-            <a:r>
-              <a:rPr/>
-              <a:t>Author triad uses Day-3 brief + Day-4 objection map. Stakeholder triad has the brief + map + 1–2 surprise objections from instructor.</a:t>
+              <a:t>Quad pairs • 90 minutes total</a:t>
+            </a:r>
+          </a:p>
+          <a:p>
+            <a:pPr lvl="0" indent="0" marL="0">
+              <a:buNone/>
+            </a:pPr>
+            <a:r>
+              <a:rPr/>
+              <a:t>Author quad uses Day-3 brief + Day-4 objection map. Stakeholder quad has the brief + map + 1–2 surprise objections from instructor.</a:t>
             </a:r>
           </a:p>
           <a:p>
